--- a/btabok/niveau-2/deel-15/slidedeck.pptx
+++ b/btabok/niveau-2/deel-15/slidedeck.pptx
@@ -3997,41 +3997,40 @@
           </a:p>
         </p:txBody>
       </p:sp>
-      <p:sp>
-        <p:nvSpPr>
-          <p:cNvPr id="3" name="Shape 1"/>
+      <p:pic>
+        <p:nvPicPr>
+          <p:cNvPr id="3" name="Image 0" descr="C:\Projecten\eductus-trainingen\BTABOK\figuren\figuur-15-3.png">    </p:cNvPr>
+          <p:cNvPicPr>
+            <a:picLocks noChangeAspect="1"/>
+          </p:cNvPicPr>
+          <p:nvPr/>
+        </p:nvPicPr>
+        <p:blipFill>
+          <a:blip r:embed="rId1"/>
+          <a:stretch>
+            <a:fillRect/>
+          </a:stretch>
+        </p:blipFill>
+        <p:spPr>
+          <a:xfrm>
+            <a:off x="2961345" y="1234440"/>
+            <a:ext cx="6238830" cy="4160520"/>
+          </a:xfrm>
+          <a:prstGeom prst="rect">
+            <a:avLst/>
+          </a:prstGeom>
+        </p:spPr>
+      </p:pic>
+      <p:sp>
+        <p:nvSpPr>
+          <p:cNvPr id="4" name="Text 1"/>
           <p:cNvSpPr/>
           <p:nvPr/>
         </p:nvSpPr>
         <p:spPr>
           <a:xfrm>
-            <a:off x="1371600" y="1280160"/>
-            <a:ext cx="9418320" cy="4389120"/>
-          </a:xfrm>
-          <a:prstGeom prst="rect">
-            <a:avLst/>
-          </a:prstGeom>
-          <a:solidFill>
-            <a:srgbClr val="F4F2EC"/>
-          </a:solidFill>
-          <a:ln w="12700">
-            <a:solidFill>
-              <a:srgbClr val="DFDCD3"/>
-            </a:solidFill>
-            <a:prstDash val="dash"/>
-          </a:ln>
-        </p:spPr>
-      </p:sp>
-      <p:sp>
-        <p:nvSpPr>
-          <p:cNvPr id="4" name="Text 2"/>
-          <p:cNvSpPr/>
-          <p:nvPr/>
-        </p:nvSpPr>
-        <p:spPr>
-          <a:xfrm>
-            <a:off x="1554480" y="1280160"/>
-            <a:ext cx="9052560" cy="4389120"/>
+            <a:off x="822960" y="5486400"/>
+            <a:ext cx="10515600" cy="457200"/>
           </a:xfrm>
           <a:prstGeom prst="rect">
             <a:avLst/>
@@ -4047,25 +4046,7 @@
               <a:buNone/>
             </a:pPr>
             <a:r>
-              <a:rPr lang="en-US" sz="1600" i="1" dirty="0">
-                <a:solidFill>
-                  <a:srgbClr val="14213D"/>
-                </a:solidFill>
-                <a:latin typeface="DM Sans" pitchFamily="34" charset="0"/>
-                <a:ea typeface="DM Sans" pitchFamily="34" charset="-122"/>
-                <a:cs typeface="DM Sans" pitchFamily="34" charset="-120"/>
-              </a:rPr>
-              <a:t>Figuur 15-3 — vijf stappen, doorlooptijd en wachttijd
-</a:t>
-            </a:r>
-            <a:endParaRPr lang="en-US" sz="1600" dirty="0"/>
-          </a:p>
-          <a:p>
-            <a:pPr algn="ctr" indent="0" marL="0">
-              <a:buNone/>
-            </a:pPr>
-            <a:r>
-              <a:rPr lang="en-US" sz="1200" i="1" dirty="0">
+              <a:rPr lang="en-US" sz="1300" i="1" dirty="0">
                 <a:solidFill>
                   <a:srgbClr val="55606F"/>
                 </a:solidFill>
@@ -4073,9 +4054,9 @@
                 <a:ea typeface="DM Sans" pitchFamily="34" charset="-122"/>
                 <a:cs typeface="DM Sans" pitchFamily="34" charset="-120"/>
               </a:rPr>
-              <a:t>wordt toegevoegd bij de interactieve versie</a:t>
-            </a:r>
-            <a:endParaRPr lang="en-US" sz="1600" dirty="0"/>
+              <a:t>Figuur 15-3 — vijf stappen, doorlooptijd en wachttijd</a:t>
+            </a:r>
+            <a:endParaRPr lang="en-US" sz="1300" dirty="0"/>
           </a:p>
         </p:txBody>
       </p:sp>
@@ -4679,41 +4660,40 @@
           </a:p>
         </p:txBody>
       </p:sp>
-      <p:sp>
-        <p:nvSpPr>
-          <p:cNvPr id="3" name="Shape 1"/>
+      <p:pic>
+        <p:nvPicPr>
+          <p:cNvPr id="3" name="Image 0" descr="C:\Projecten\eductus-trainingen\BTABOK\figuren\figuur-15-4.png">    </p:cNvPr>
+          <p:cNvPicPr>
+            <a:picLocks noChangeAspect="1"/>
+          </p:cNvPicPr>
+          <p:nvPr/>
+        </p:nvPicPr>
+        <p:blipFill>
+          <a:blip r:embed="rId1"/>
+          <a:stretch>
+            <a:fillRect/>
+          </a:stretch>
+        </p:blipFill>
+        <p:spPr>
+          <a:xfrm>
+            <a:off x="2961345" y="1234440"/>
+            <a:ext cx="6238830" cy="4160520"/>
+          </a:xfrm>
+          <a:prstGeom prst="rect">
+            <a:avLst/>
+          </a:prstGeom>
+        </p:spPr>
+      </p:pic>
+      <p:sp>
+        <p:nvSpPr>
+          <p:cNvPr id="4" name="Text 1"/>
           <p:cNvSpPr/>
           <p:nvPr/>
         </p:nvSpPr>
         <p:spPr>
           <a:xfrm>
-            <a:off x="1371600" y="1280160"/>
-            <a:ext cx="9418320" cy="4389120"/>
-          </a:xfrm>
-          <a:prstGeom prst="rect">
-            <a:avLst/>
-          </a:prstGeom>
-          <a:solidFill>
-            <a:srgbClr val="F4F2EC"/>
-          </a:solidFill>
-          <a:ln w="12700">
-            <a:solidFill>
-              <a:srgbClr val="DFDCD3"/>
-            </a:solidFill>
-            <a:prstDash val="dash"/>
-          </a:ln>
-        </p:spPr>
-      </p:sp>
-      <p:sp>
-        <p:nvSpPr>
-          <p:cNvPr id="4" name="Text 2"/>
-          <p:cNvSpPr/>
-          <p:nvPr/>
-        </p:nvSpPr>
-        <p:spPr>
-          <a:xfrm>
-            <a:off x="1554480" y="1280160"/>
-            <a:ext cx="9052560" cy="4389120"/>
+            <a:off x="822960" y="5486400"/>
+            <a:ext cx="10515600" cy="457200"/>
           </a:xfrm>
           <a:prstGeom prst="rect">
             <a:avLst/>
@@ -4729,25 +4709,7 @@
               <a:buNone/>
             </a:pPr>
             <a:r>
-              <a:rPr lang="en-US" sz="1600" i="1" dirty="0">
-                <a:solidFill>
-                  <a:srgbClr val="14213D"/>
-                </a:solidFill>
-                <a:latin typeface="DM Sans" pitchFamily="34" charset="0"/>
-                <a:ea typeface="DM Sans" pitchFamily="34" charset="-122"/>
-                <a:cs typeface="DM Sans" pitchFamily="34" charset="-120"/>
-              </a:rPr>
-              <a:t>Figuur 15-4 — batenrealisatieplan als tijdlijn
-</a:t>
-            </a:r>
-            <a:endParaRPr lang="en-US" sz="1600" dirty="0"/>
-          </a:p>
-          <a:p>
-            <a:pPr algn="ctr" indent="0" marL="0">
-              <a:buNone/>
-            </a:pPr>
-            <a:r>
-              <a:rPr lang="en-US" sz="1200" i="1" dirty="0">
+              <a:rPr lang="en-US" sz="1300" i="1" dirty="0">
                 <a:solidFill>
                   <a:srgbClr val="55606F"/>
                 </a:solidFill>
@@ -4755,9 +4717,9 @@
                 <a:ea typeface="DM Sans" pitchFamily="34" charset="-122"/>
                 <a:cs typeface="DM Sans" pitchFamily="34" charset="-120"/>
               </a:rPr>
-              <a:t>wordt toegevoegd bij de interactieve versie</a:t>
-            </a:r>
-            <a:endParaRPr lang="en-US" sz="1600" dirty="0"/>
+              <a:t>Figuur 15-4 — batenrealisatieplan als tijdlijn</a:t>
+            </a:r>
+            <a:endParaRPr lang="en-US" sz="1300" dirty="0"/>
           </a:p>
         </p:txBody>
       </p:sp>
@@ -6041,41 +6003,40 @@
           </a:p>
         </p:txBody>
       </p:sp>
-      <p:sp>
-        <p:nvSpPr>
-          <p:cNvPr id="3" name="Shape 1"/>
+      <p:pic>
+        <p:nvPicPr>
+          <p:cNvPr id="3" name="Image 0" descr="C:\Projecten\eductus-trainingen\BTABOK\figuren\figuur-15-5.png">    </p:cNvPr>
+          <p:cNvPicPr>
+            <a:picLocks noChangeAspect="1"/>
+          </p:cNvPicPr>
+          <p:nvPr/>
+        </p:nvPicPr>
+        <p:blipFill>
+          <a:blip r:embed="rId1"/>
+          <a:stretch>
+            <a:fillRect/>
+          </a:stretch>
+        </p:blipFill>
+        <p:spPr>
+          <a:xfrm>
+            <a:off x="2961345" y="1234440"/>
+            <a:ext cx="6238830" cy="4160520"/>
+          </a:xfrm>
+          <a:prstGeom prst="rect">
+            <a:avLst/>
+          </a:prstGeom>
+        </p:spPr>
+      </p:pic>
+      <p:sp>
+        <p:nvSpPr>
+          <p:cNvPr id="4" name="Text 1"/>
           <p:cNvSpPr/>
           <p:nvPr/>
         </p:nvSpPr>
         <p:spPr>
           <a:xfrm>
-            <a:off x="1371600" y="1280160"/>
-            <a:ext cx="9418320" cy="4389120"/>
-          </a:xfrm>
-          <a:prstGeom prst="rect">
-            <a:avLst/>
-          </a:prstGeom>
-          <a:solidFill>
-            <a:srgbClr val="F4F2EC"/>
-          </a:solidFill>
-          <a:ln w="12700">
-            <a:solidFill>
-              <a:srgbClr val="DFDCD3"/>
-            </a:solidFill>
-            <a:prstDash val="dash"/>
-          </a:ln>
-        </p:spPr>
-      </p:sp>
-      <p:sp>
-        <p:nvSpPr>
-          <p:cNvPr id="4" name="Text 2"/>
-          <p:cNvSpPr/>
-          <p:nvPr/>
-        </p:nvSpPr>
-        <p:spPr>
-          <a:xfrm>
-            <a:off x="1554480" y="1280160"/>
-            <a:ext cx="9052560" cy="4389120"/>
+            <a:off x="822960" y="5486400"/>
+            <a:ext cx="10515600" cy="457200"/>
           </a:xfrm>
           <a:prstGeom prst="rect">
             <a:avLst/>
@@ -6091,25 +6052,7 @@
               <a:buNone/>
             </a:pPr>
             <a:r>
-              <a:rPr lang="en-US" sz="1600" i="1" dirty="0">
-                <a:solidFill>
-                  <a:srgbClr val="14213D"/>
-                </a:solidFill>
-                <a:latin typeface="DM Sans" pitchFamily="34" charset="0"/>
-                <a:ea typeface="DM Sans" pitchFamily="34" charset="-122"/>
-                <a:cs typeface="DM Sans" pitchFamily="34" charset="-120"/>
-              </a:rPr>
-              <a:t>Figuur 15-5 — waarderen → uitvoeren → meten → terugkoppelen
-</a:t>
-            </a:r>
-            <a:endParaRPr lang="en-US" sz="1600" dirty="0"/>
-          </a:p>
-          <a:p>
-            <a:pPr algn="ctr" indent="0" marL="0">
-              <a:buNone/>
-            </a:pPr>
-            <a:r>
-              <a:rPr lang="en-US" sz="1200" i="1" dirty="0">
+              <a:rPr lang="en-US" sz="1300" i="1" dirty="0">
                 <a:solidFill>
                   <a:srgbClr val="55606F"/>
                 </a:solidFill>
@@ -6117,9 +6060,9 @@
                 <a:ea typeface="DM Sans" pitchFamily="34" charset="-122"/>
                 <a:cs typeface="DM Sans" pitchFamily="34" charset="-120"/>
               </a:rPr>
-              <a:t>wordt toegevoegd bij de interactieve versie</a:t>
-            </a:r>
-            <a:endParaRPr lang="en-US" sz="1600" dirty="0"/>
+              <a:t>Figuur 15-5 — waarderen → uitvoeren → meten → terugkoppelen</a:t>
+            </a:r>
+            <a:endParaRPr lang="en-US" sz="1300" dirty="0"/>
           </a:p>
         </p:txBody>
       </p:sp>
@@ -7331,41 +7274,40 @@
           </a:p>
         </p:txBody>
       </p:sp>
-      <p:sp>
-        <p:nvSpPr>
-          <p:cNvPr id="3" name="Shape 1"/>
+      <p:pic>
+        <p:nvPicPr>
+          <p:cNvPr id="3" name="Image 0" descr="C:\Projecten\eductus-trainingen\BTABOK\figuren\figuur-15-1.png">    </p:cNvPr>
+          <p:cNvPicPr>
+            <a:picLocks noChangeAspect="1"/>
+          </p:cNvPicPr>
+          <p:nvPr/>
+        </p:nvPicPr>
+        <p:blipFill>
+          <a:blip r:embed="rId1"/>
+          <a:stretch>
+            <a:fillRect/>
+          </a:stretch>
+        </p:blipFill>
+        <p:spPr>
+          <a:xfrm>
+            <a:off x="2961345" y="1234440"/>
+            <a:ext cx="6238830" cy="4160520"/>
+          </a:xfrm>
+          <a:prstGeom prst="rect">
+            <a:avLst/>
+          </a:prstGeom>
+        </p:spPr>
+      </p:pic>
+      <p:sp>
+        <p:nvSpPr>
+          <p:cNvPr id="4" name="Text 1"/>
           <p:cNvSpPr/>
           <p:nvPr/>
         </p:nvSpPr>
         <p:spPr>
           <a:xfrm>
-            <a:off x="1371600" y="1280160"/>
-            <a:ext cx="9418320" cy="4389120"/>
-          </a:xfrm>
-          <a:prstGeom prst="rect">
-            <a:avLst/>
-          </a:prstGeom>
-          <a:solidFill>
-            <a:srgbClr val="F4F2EC"/>
-          </a:solidFill>
-          <a:ln w="12700">
-            <a:solidFill>
-              <a:srgbClr val="DFDCD3"/>
-            </a:solidFill>
-            <a:prstDash val="dash"/>
-          </a:ln>
-        </p:spPr>
-      </p:sp>
-      <p:sp>
-        <p:nvSpPr>
-          <p:cNvPr id="4" name="Text 2"/>
-          <p:cNvSpPr/>
-          <p:nvPr/>
-        </p:nvSpPr>
-        <p:spPr>
-          <a:xfrm>
-            <a:off x="1554480" y="1280160"/>
-            <a:ext cx="9052560" cy="4389120"/>
+            <a:off x="822960" y="5486400"/>
+            <a:ext cx="10515600" cy="457200"/>
           </a:xfrm>
           <a:prstGeom prst="rect">
             <a:avLst/>
@@ -7381,25 +7323,7 @@
               <a:buNone/>
             </a:pPr>
             <a:r>
-              <a:rPr lang="en-US" sz="1600" i="1" dirty="0">
-                <a:solidFill>
-                  <a:srgbClr val="14213D"/>
-                </a:solidFill>
-                <a:latin typeface="DM Sans" pitchFamily="34" charset="0"/>
-                <a:ea typeface="DM Sans" pitchFamily="34" charset="-122"/>
-                <a:cs typeface="DM Sans" pitchFamily="34" charset="-120"/>
-              </a:rPr>
-              <a:t>Figuur 15-1 — zeven maanden budget, "aantoonbare opbrengst" leeg
-</a:t>
-            </a:r>
-            <a:endParaRPr lang="en-US" sz="1600" dirty="0"/>
-          </a:p>
-          <a:p>
-            <a:pPr algn="ctr" indent="0" marL="0">
-              <a:buNone/>
-            </a:pPr>
-            <a:r>
-              <a:rPr lang="en-US" sz="1200" i="1" dirty="0">
+              <a:rPr lang="en-US" sz="1300" i="1" dirty="0">
                 <a:solidFill>
                   <a:srgbClr val="55606F"/>
                 </a:solidFill>
@@ -7407,9 +7331,9 @@
                 <a:ea typeface="DM Sans" pitchFamily="34" charset="-122"/>
                 <a:cs typeface="DM Sans" pitchFamily="34" charset="-120"/>
               </a:rPr>
-              <a:t>wordt toegevoegd bij de interactieve versie</a:t>
-            </a:r>
-            <a:endParaRPr lang="en-US" sz="1600" dirty="0"/>
+              <a:t>Figuur 15-1 — zeven maanden budget, "aantoonbare opbrengst" leeg</a:t>
+            </a:r>
+            <a:endParaRPr lang="en-US" sz="1300" dirty="0"/>
           </a:p>
         </p:txBody>
       </p:sp>
